--- a/templates/decks/zh/kids-ai-explainer/template.pptx
+++ b/templates/decks/zh/kids-ai-explainer/template.pptx
@@ -376,7 +376,7 @@
             <a:pPr indent="0" algn="r">
               <a:buNone/>
             </a:pPr>
-            <a:fld id="{13F72235-69F0-4A9B-BBD9-B5FAA00CD4C0}" type="slidenum">
+            <a:fld id="{D064DD0B-1F75-4F07-8ED4-11991359DEE2}" type="slidenum">
               <a:rPr lang="en-US" sz="1400" b="0" u="none" strike="noStrike">
                 <a:solidFill>
                   <a:srgbClr val="000000"/>
@@ -572,7 +572,7 @@
               </a:lnSpc>
               <a:buNone/>
             </a:pPr>
-            <a:fld id="{F0CA1EBB-7BEE-4BDD-953A-9E5AF29DE536}" type="slidenum">
+            <a:fld id="{642B6E13-AFBF-4AF1-8AB3-62703FA43F1F}" type="slidenum">
               <a:rPr lang="en-US" sz="1200" b="0" u="none" strike="noStrike">
                 <a:solidFill>
                   <a:srgbClr val="000000"/>
@@ -745,7 +745,7 @@
               </a:lnSpc>
               <a:buNone/>
             </a:pPr>
-            <a:fld id="{532BC54F-44F0-4B0F-AD9C-61CC9DED5B41}" type="slidenum">
+            <a:fld id="{94084618-E8CF-4605-97A4-0CFABED427FC}" type="slidenum">
               <a:rPr lang="en-US" sz="1200" b="0" u="none" strike="noStrike">
                 <a:solidFill>
                   <a:srgbClr val="000000"/>
@@ -940,7 +940,7 @@
               </a:lnSpc>
               <a:buNone/>
             </a:pPr>
-            <a:fld id="{68FAAA4E-9D21-4911-A178-9E9E08DF085B}" type="slidenum">
+            <a:fld id="{E3789FF0-FD9A-4447-9C7A-C81DC8A2D53D}" type="slidenum">
               <a:rPr lang="en-US" sz="1200" b="0" u="none" strike="noStrike">
                 <a:solidFill>
                   <a:srgbClr val="000000"/>
@@ -1113,7 +1113,7 @@
               </a:lnSpc>
               <a:buNone/>
             </a:pPr>
-            <a:fld id="{DAC28CBD-4E95-4B77-8B53-56439D682911}" type="slidenum">
+            <a:fld id="{606EB97F-90D3-429F-A52F-1E6F5B72B363}" type="slidenum">
               <a:rPr lang="en-US" sz="1200" b="0" u="none" strike="noStrike">
                 <a:solidFill>
                   <a:srgbClr val="000000"/>
@@ -1330,7 +1330,7 @@
               </a:lnSpc>
               <a:buNone/>
             </a:pPr>
-            <a:fld id="{C96C9668-81FB-49E9-BDFC-6CCE872D5875}" type="slidenum">
+            <a:fld id="{881970E7-9FEA-4A04-9358-FEEC3F0BA078}" type="slidenum">
               <a:rPr lang="en-US" sz="1200" b="0" u="none" strike="noStrike">
                 <a:solidFill>
                   <a:srgbClr val="000000"/>
@@ -1525,7 +1525,7 @@
               </a:lnSpc>
               <a:buNone/>
             </a:pPr>
-            <a:fld id="{2D80816C-D0EC-4F15-AA96-903EFA18B190}" type="slidenum">
+            <a:fld id="{E0576888-66C5-4246-8EEA-7F8C7081F42C}" type="slidenum">
               <a:rPr lang="en-US" sz="1200" b="0" u="none" strike="noStrike">
                 <a:solidFill>
                   <a:srgbClr val="000000"/>
@@ -1720,7 +1720,7 @@
               </a:lnSpc>
               <a:buNone/>
             </a:pPr>
-            <a:fld id="{25C5E2C3-A765-43E6-9FE9-8AE29AA70F9B}" type="slidenum">
+            <a:fld id="{28C849E1-0DD5-4285-A227-152E6A028016}" type="slidenum">
               <a:rPr lang="en-US" sz="1200" b="0" u="none" strike="noStrike">
                 <a:solidFill>
                   <a:srgbClr val="000000"/>
@@ -1915,7 +1915,7 @@
               </a:lnSpc>
               <a:buNone/>
             </a:pPr>
-            <a:fld id="{C0DD9432-AA68-4D35-9B28-95616D4A02C1}" type="slidenum">
+            <a:fld id="{F3B1C07B-8851-45A8-890B-9AC841109CD2}" type="slidenum">
               <a:rPr lang="en-US" sz="1200" b="0" u="none" strike="noStrike">
                 <a:solidFill>
                   <a:srgbClr val="000000"/>
@@ -2110,7 +2110,7 @@
               </a:lnSpc>
               <a:buNone/>
             </a:pPr>
-            <a:fld id="{3EB4EEAA-CCC4-4E03-B7D8-8533E3FBC835}" type="slidenum">
+            <a:fld id="{75C50E35-6443-4CCC-A7F9-E046764ECCF9}" type="slidenum">
               <a:rPr lang="en-US" sz="1200" b="0" u="none" strike="noStrike">
                 <a:solidFill>
                   <a:srgbClr val="000000"/>
@@ -2294,7 +2294,7 @@
               </a:lnSpc>
               <a:buNone/>
             </a:pPr>
-            <a:fld id="{7B560DAC-8D65-4C43-8733-19FF2B8C443B}" type="slidenum">
+            <a:fld id="{6A044F22-97A0-4C62-A876-80C632643909}" type="slidenum">
               <a:rPr lang="en-US" sz="1200" b="0" u="none" strike="noStrike">
                 <a:solidFill>
                   <a:srgbClr val="000000"/>
@@ -2467,7 +2467,7 @@
               </a:lnSpc>
               <a:buNone/>
             </a:pPr>
-            <a:fld id="{F9EC3452-2D33-4AF0-8495-397871749DB8}" type="slidenum">
+            <a:fld id="{BBADAD21-269C-4EDE-AE6D-2B7E283BF49C}" type="slidenum">
               <a:rPr lang="en-US" sz="1200" b="0" u="none" strike="noStrike">
                 <a:solidFill>
                   <a:srgbClr val="000000"/>
@@ -2640,7 +2640,7 @@
               </a:lnSpc>
               <a:buNone/>
             </a:pPr>
-            <a:fld id="{2CA50C60-B615-4862-A1CF-BA6E9A4DA54B}" type="slidenum">
+            <a:fld id="{A92A55D3-F453-4B06-80DE-24985AB4FBDF}" type="slidenum">
               <a:rPr lang="en-US" sz="1200" b="0" u="none" strike="noStrike">
                 <a:solidFill>
                   <a:srgbClr val="000000"/>
@@ -2957,7 +2957,7 @@
               </a:lnSpc>
               <a:buNone/>
             </a:pPr>
-            <a:fld id="{91179F4C-7873-478D-B354-221E810DADF4}" type="slidenum">
+            <a:fld id="{8B880186-95B6-4904-9C23-FA202EC901CA}" type="slidenum">
               <a:rPr lang="en-US" sz="1200" b="0" u="none" strike="noStrike">
                 <a:solidFill>
                   <a:schemeClr val="dk1">
@@ -3666,7 +3666,7 @@
               </a:lnSpc>
               <a:buNone/>
             </a:pPr>
-            <a:fld id="{5A17616E-225F-4B51-AAA0-8069B2796912}" type="slidenum">
+            <a:fld id="{6FB673FA-C8D5-4AA0-BF43-FBD4210F4F04}" type="slidenum">
               <a:rPr lang="en-US" sz="1200" b="0" u="none" strike="noStrike">
                 <a:solidFill>
                   <a:schemeClr val="dk1">
@@ -4461,7 +4461,7 @@
               </a:lnSpc>
               <a:buNone/>
             </a:pPr>
-            <a:fld id="{904954A9-D91F-4170-B2D5-D4A759604808}" type="slidenum">
+            <a:fld id="{D81C5786-E305-48E8-B43D-1C3FF1BB6EE6}" type="slidenum">
               <a:rPr lang="en-US" sz="1200" b="0" u="none" strike="noStrike">
                 <a:solidFill>
                   <a:schemeClr val="dk1">
@@ -5086,7 +5086,7 @@
               </a:lnSpc>
               <a:buNone/>
             </a:pPr>
-            <a:fld id="{46EFA17B-DEAD-4B25-8E9E-01DA65BC23C5}" type="slidenum">
+            <a:fld id="{75D05435-06E4-44C1-BBE8-9ECAB8F5BD2A}" type="slidenum">
               <a:rPr lang="en-US" sz="1200" b="0" u="none" strike="noStrike">
                 <a:solidFill>
                   <a:schemeClr val="dk1">
@@ -5711,7 +5711,7 @@
               </a:lnSpc>
               <a:buNone/>
             </a:pPr>
-            <a:fld id="{F53F140F-53DA-4B21-9357-4423F0F60A3C}" type="slidenum">
+            <a:fld id="{3C2A3EFB-A64D-4B1D-AD7A-F43BF14C229C}" type="slidenum">
               <a:rPr lang="en-US" sz="1200" b="0" u="none" strike="noStrike">
                 <a:solidFill>
                   <a:schemeClr val="dk1">
@@ -6336,7 +6336,7 @@
               </a:lnSpc>
               <a:buNone/>
             </a:pPr>
-            <a:fld id="{845E805B-7B3A-4938-8A0A-DC82D69B0A58}" type="slidenum">
+            <a:fld id="{7A11F0E0-96D2-4EBB-9383-42E127D328B2}" type="slidenum">
               <a:rPr lang="en-US" sz="1200" b="0" u="none" strike="noStrike">
                 <a:solidFill>
                   <a:schemeClr val="dk1">
@@ -6745,7 +6745,7 @@
               </a:lnSpc>
               <a:buNone/>
             </a:pPr>
-            <a:fld id="{90A9627A-454D-48C5-BD0B-C7BFE59B0038}" type="slidenum">
+            <a:fld id="{C7E054F7-014C-438B-A55E-72A0B1A5CD50}" type="slidenum">
               <a:rPr lang="en-US" sz="1200" b="0" u="none" strike="noStrike">
                 <a:solidFill>
                   <a:schemeClr val="dk1">
@@ -7676,7 +7676,7 @@
               </a:lnSpc>
               <a:buNone/>
             </a:pPr>
-            <a:fld id="{2F04B484-3F0A-4DFB-A0F7-620D4001D9F4}" type="slidenum">
+            <a:fld id="{E8FB9034-E520-494B-8278-50CFB0CB66E7}" type="slidenum">
               <a:rPr lang="en-US" sz="1200" b="0" u="none" strike="noStrike">
                 <a:solidFill>
                   <a:schemeClr val="dk1">
@@ -8835,7 +8835,7 @@
               </a:lnSpc>
               <a:buNone/>
             </a:pPr>
-            <a:fld id="{3B4A1A9E-C678-4351-A430-43CEE12F7086}" type="slidenum">
+            <a:fld id="{CB381A56-F6EC-48D4-BBFE-E2F635EEAF5C}" type="slidenum">
               <a:rPr lang="en-US" sz="1200" b="0" u="none" strike="noStrike">
                 <a:solidFill>
                   <a:schemeClr val="dk1">
@@ -9154,7 +9154,7 @@
               </a:lnSpc>
               <a:buNone/>
             </a:pPr>
-            <a:fld id="{2DF3E8A0-B601-41F8-9545-F9130A74CB7B}" type="slidenum">
+            <a:fld id="{704F78F9-E291-4324-A282-D0ED5FF06064}" type="slidenum">
               <a:rPr lang="en-US" sz="1200" b="0" u="none" strike="noStrike">
                 <a:solidFill>
                   <a:schemeClr val="dk1">
@@ -9401,7 +9401,7 @@
               </a:lnSpc>
               <a:buNone/>
             </a:pPr>
-            <a:fld id="{05A488B4-7856-40F8-89DC-39394CC4F62F}" type="slidenum">
+            <a:fld id="{C7BE9744-646F-4DBC-91BE-258A8C167BF6}" type="slidenum">
               <a:rPr lang="en-US" sz="1200" b="0" u="none" strike="noStrike">
                 <a:solidFill>
                   <a:schemeClr val="dk1">
@@ -32310,8 +32310,8 @@
         </p:nvSpPr>
         <p:spPr>
           <a:xfrm>
-            <a:off x="2855160" y="2557440"/>
-            <a:ext cx="50040" cy="252000"/>
+            <a:off x="2858040" y="2622240"/>
+            <a:ext cx="44640" cy="224640"/>
           </a:xfrm>
           <a:prstGeom prst="roundRect">
             <a:avLst>
@@ -32368,8 +32368,8 @@
         </p:nvSpPr>
         <p:spPr>
           <a:xfrm>
-            <a:off x="2804760" y="2464920"/>
-            <a:ext cx="151200" cy="151200"/>
+            <a:off x="2813040" y="2539800"/>
+            <a:ext cx="134640" cy="134640"/>
           </a:xfrm>
           <a:prstGeom prst="ellipse">
             <a:avLst/>
@@ -32424,8 +32424,8 @@
         </p:nvSpPr>
         <p:spPr>
           <a:xfrm>
-            <a:off x="2838240" y="2498400"/>
-            <a:ext cx="83880" cy="83880"/>
+            <a:off x="2842920" y="2569680"/>
+            <a:ext cx="74520" cy="74520"/>
           </a:xfrm>
           <a:prstGeom prst="star4">
             <a:avLst>
@@ -32459,7 +32459,7 @@
           <a:fontRef idx="minor"/>
         </p:style>
         <p:txBody>
-          <a:bodyPr lIns="90000" tIns="-30240" rIns="90000" bIns="-30240" anchor="ctr">
+          <a:bodyPr lIns="90000" tIns="-31680" rIns="90000" bIns="-31680" anchor="ctr">
             <a:noAutofit/>
           </a:bodyPr>
           <a:p>
@@ -32482,8 +32482,8 @@
         </p:nvSpPr>
         <p:spPr>
           <a:xfrm>
-            <a:off x="2400840" y="3062160"/>
-            <a:ext cx="75240" cy="184680"/>
+            <a:off x="2453040" y="3072240"/>
+            <a:ext cx="66960" cy="164520"/>
           </a:xfrm>
           <a:prstGeom prst="roundRect">
             <a:avLst>
@@ -32540,8 +32540,8 @@
         </p:nvSpPr>
         <p:spPr>
           <a:xfrm>
-            <a:off x="3284280" y="3062160"/>
-            <a:ext cx="75240" cy="184680"/>
+            <a:off x="3240360" y="3072240"/>
+            <a:ext cx="66960" cy="164520"/>
           </a:xfrm>
           <a:prstGeom prst="roundRect">
             <a:avLst>
@@ -32598,8 +32598,8 @@
         </p:nvSpPr>
         <p:spPr>
           <a:xfrm>
-            <a:off x="2459880" y="2792880"/>
-            <a:ext cx="840960" cy="723240"/>
+            <a:off x="2505600" y="2832120"/>
+            <a:ext cx="749520" cy="644400"/>
           </a:xfrm>
           <a:prstGeom prst="roundRect">
             <a:avLst>
@@ -32656,8 +32656,8 @@
         </p:nvSpPr>
         <p:spPr>
           <a:xfrm>
-            <a:off x="2560680" y="2947320"/>
-            <a:ext cx="639000" cy="448200"/>
+            <a:off x="2595600" y="2969640"/>
+            <a:ext cx="569520" cy="399600"/>
           </a:xfrm>
           <a:prstGeom prst="roundRect">
             <a:avLst>
@@ -32714,8 +32714,8 @@
         </p:nvSpPr>
         <p:spPr>
           <a:xfrm>
-            <a:off x="2683080" y="3078720"/>
-            <a:ext cx="113040" cy="113040"/>
+            <a:off x="2704320" y="3087000"/>
+            <a:ext cx="100800" cy="100800"/>
           </a:xfrm>
           <a:prstGeom prst="ellipse">
             <a:avLst/>
@@ -32747,7 +32747,7 @@
           <a:fontRef idx="minor"/>
         </p:style>
         <p:txBody>
-          <a:bodyPr lIns="90000" tIns="34920" rIns="90000" bIns="34920" anchor="ctr">
+          <a:bodyPr lIns="90000" tIns="26280" rIns="90000" bIns="26280" anchor="ctr">
             <a:noAutofit/>
           </a:bodyPr>
           <a:p>
@@ -32770,8 +32770,8 @@
         </p:nvSpPr>
         <p:spPr>
           <a:xfrm>
-            <a:off x="2714760" y="3117600"/>
-            <a:ext cx="49680" cy="49680"/>
+            <a:off x="2732760" y="3121560"/>
+            <a:ext cx="44280" cy="44280"/>
           </a:xfrm>
           <a:prstGeom prst="ellipse">
             <a:avLst/>
@@ -32803,7 +32803,7 @@
           <a:fontRef idx="minor"/>
         </p:style>
         <p:txBody>
-          <a:bodyPr lIns="90000" tIns="-9720" rIns="90000" bIns="-9720" anchor="ctr">
+          <a:bodyPr lIns="90000" tIns="-13680" rIns="90000" bIns="-13680" anchor="ctr">
             <a:noAutofit/>
           </a:bodyPr>
           <a:p>
@@ -32826,8 +32826,8 @@
         </p:nvSpPr>
         <p:spPr>
           <a:xfrm>
-            <a:off x="2709000" y="3105000"/>
-            <a:ext cx="24480" cy="24480"/>
+            <a:off x="2727720" y="3110400"/>
+            <a:ext cx="21960" cy="21960"/>
           </a:xfrm>
           <a:prstGeom prst="ellipse">
             <a:avLst/>
@@ -32859,7 +32859,7 @@
           <a:fontRef idx="minor"/>
         </p:style>
         <p:txBody>
-          <a:bodyPr lIns="90000" tIns="-27720" rIns="90000" bIns="-27720" anchor="ctr">
+          <a:bodyPr lIns="90000" tIns="-29520" rIns="90000" bIns="-29520" anchor="ctr">
             <a:noAutofit/>
           </a:bodyPr>
           <a:p>
@@ -32882,8 +32882,8 @@
         </p:nvSpPr>
         <p:spPr>
           <a:xfrm>
-            <a:off x="2964240" y="3078720"/>
-            <a:ext cx="113040" cy="113040"/>
+            <a:off x="2955240" y="3087000"/>
+            <a:ext cx="100800" cy="100800"/>
           </a:xfrm>
           <a:prstGeom prst="ellipse">
             <a:avLst/>
@@ -32915,7 +32915,7 @@
           <a:fontRef idx="minor"/>
         </p:style>
         <p:txBody>
-          <a:bodyPr lIns="90000" tIns="34920" rIns="90000" bIns="34920" anchor="ctr">
+          <a:bodyPr lIns="90000" tIns="26280" rIns="90000" bIns="26280" anchor="ctr">
             <a:noAutofit/>
           </a:bodyPr>
           <a:p>
@@ -32938,8 +32938,8 @@
         </p:nvSpPr>
         <p:spPr>
           <a:xfrm>
-            <a:off x="2995920" y="3117600"/>
-            <a:ext cx="49680" cy="49680"/>
+            <a:off x="2983320" y="3121560"/>
+            <a:ext cx="44280" cy="44280"/>
           </a:xfrm>
           <a:prstGeom prst="ellipse">
             <a:avLst/>
@@ -32971,7 +32971,7 @@
           <a:fontRef idx="minor"/>
         </p:style>
         <p:txBody>
-          <a:bodyPr lIns="90000" tIns="-9720" rIns="90000" bIns="-9720" anchor="ctr">
+          <a:bodyPr lIns="90000" tIns="-13680" rIns="90000" bIns="-13680" anchor="ctr">
             <a:noAutofit/>
           </a:bodyPr>
           <a:p>
@@ -32994,8 +32994,8 @@
         </p:nvSpPr>
         <p:spPr>
           <a:xfrm>
-            <a:off x="2990520" y="3105000"/>
-            <a:ext cx="24480" cy="24480"/>
+            <a:off x="2978280" y="3110400"/>
+            <a:ext cx="21960" cy="21960"/>
           </a:xfrm>
           <a:prstGeom prst="ellipse">
             <a:avLst/>
@@ -33027,7 +33027,7 @@
           <a:fontRef idx="minor"/>
         </p:style>
         <p:txBody>
-          <a:bodyPr lIns="90000" tIns="-27720" rIns="90000" bIns="-27720" anchor="ctr">
+          <a:bodyPr lIns="90000" tIns="-29520" rIns="90000" bIns="-29520" anchor="ctr">
             <a:noAutofit/>
           </a:bodyPr>
           <a:p>
@@ -33050,8 +33050,8 @@
         </p:nvSpPr>
         <p:spPr>
           <a:xfrm>
-            <a:off x="2670840" y="3197160"/>
-            <a:ext cx="92160" cy="92160"/>
+            <a:off x="2693520" y="3192480"/>
+            <a:ext cx="82080" cy="82080"/>
           </a:xfrm>
           <a:prstGeom prst="ellipse">
             <a:avLst/>
@@ -33085,7 +33085,7 @@
           <a:fontRef idx="minor"/>
         </p:style>
         <p:txBody>
-          <a:bodyPr lIns="90000" tIns="20520" rIns="90000" bIns="20520" anchor="ctr">
+          <a:bodyPr lIns="90000" tIns="13320" rIns="90000" bIns="13320" anchor="ctr">
             <a:noAutofit/>
           </a:bodyPr>
           <a:p>
@@ -33108,8 +33108,8 @@
         </p:nvSpPr>
         <p:spPr>
           <a:xfrm>
-            <a:off x="2997360" y="3197160"/>
-            <a:ext cx="92160" cy="92160"/>
+            <a:off x="2984760" y="3192480"/>
+            <a:ext cx="82080" cy="82080"/>
           </a:xfrm>
           <a:prstGeom prst="ellipse">
             <a:avLst/>
@@ -33143,7 +33143,7 @@
           <a:fontRef idx="minor"/>
         </p:style>
         <p:txBody>
-          <a:bodyPr lIns="90000" tIns="20520" rIns="90000" bIns="20520" anchor="ctr">
+          <a:bodyPr lIns="90000" tIns="13320" rIns="90000" bIns="13320" anchor="ctr">
             <a:noAutofit/>
           </a:bodyPr>
           <a:p>
@@ -33166,8 +33166,8 @@
         </p:nvSpPr>
         <p:spPr>
           <a:xfrm>
-            <a:off x="2754000" y="3137760"/>
-            <a:ext cx="252000" cy="252000"/>
+            <a:off x="2768040" y="3139560"/>
+            <a:ext cx="224640" cy="224640"/>
           </a:xfrm>
           <a:prstGeom prst="arc">
             <a:avLst>
@@ -33176,7 +33176,7 @@
             </a:avLst>
           </a:prstGeom>
           <a:noFill/>
-          <a:ln cap="rnd" w="37388">
+          <a:ln cap="rnd" w="33324">
             <a:solidFill>
               <a:srgbClr val="EAF6FF"/>
             </a:solidFill>
@@ -33226,7 +33226,7 @@
         </p:nvSpPr>
         <p:spPr>
           <a:xfrm>
-            <a:off x="2432160" y="1536120"/>
+            <a:off x="2432160" y="1334880"/>
             <a:ext cx="895680" cy="895680"/>
           </a:xfrm>
           <a:prstGeom prst="ellipse">
@@ -33286,7 +33286,7 @@
         </p:blipFill>
         <p:spPr>
           <a:xfrm>
-            <a:off x="2629440" y="1733400"/>
+            <a:off x="2629440" y="1532160"/>
             <a:ext cx="501480" cy="501480"/>
           </a:xfrm>
           <a:prstGeom prst="rect">
@@ -33306,7 +33306,7 @@
         </p:nvSpPr>
         <p:spPr>
           <a:xfrm>
-            <a:off x="2011680" y="2459880"/>
+            <a:off x="2011680" y="2258640"/>
             <a:ext cx="1737000" cy="310680"/>
           </a:xfrm>
           <a:prstGeom prst="rect">

--- a/templates/decks/zh/kids-ai-explainer/template.pptx
+++ b/templates/decks/zh/kids-ai-explainer/template.pptx
@@ -376,7 +376,7 @@
             <a:pPr indent="0" algn="r">
               <a:buNone/>
             </a:pPr>
-            <a:fld id="{D064DD0B-1F75-4F07-8ED4-11991359DEE2}" type="slidenum">
+            <a:fld id="{0557F52E-7522-4034-B9D1-9883D913FBB4}" type="slidenum">
               <a:rPr lang="en-US" sz="1400" b="0" u="none" strike="noStrike">
                 <a:solidFill>
                   <a:srgbClr val="000000"/>
@@ -572,7 +572,7 @@
               </a:lnSpc>
               <a:buNone/>
             </a:pPr>
-            <a:fld id="{642B6E13-AFBF-4AF1-8AB3-62703FA43F1F}" type="slidenum">
+            <a:fld id="{2A875196-E9F3-47EB-B97F-965BBBF04ADF}" type="slidenum">
               <a:rPr lang="en-US" sz="1200" b="0" u="none" strike="noStrike">
                 <a:solidFill>
                   <a:srgbClr val="000000"/>
@@ -745,7 +745,7 @@
               </a:lnSpc>
               <a:buNone/>
             </a:pPr>
-            <a:fld id="{94084618-E8CF-4605-97A4-0CFABED427FC}" type="slidenum">
+            <a:fld id="{142DF145-EEBA-4D2B-BF54-EBFD57D67992}" type="slidenum">
               <a:rPr lang="en-US" sz="1200" b="0" u="none" strike="noStrike">
                 <a:solidFill>
                   <a:srgbClr val="000000"/>
@@ -940,7 +940,7 @@
               </a:lnSpc>
               <a:buNone/>
             </a:pPr>
-            <a:fld id="{E3789FF0-FD9A-4447-9C7A-C81DC8A2D53D}" type="slidenum">
+            <a:fld id="{1CE4CD0D-5CA1-404F-A396-45C788A2AF3B}" type="slidenum">
               <a:rPr lang="en-US" sz="1200" b="0" u="none" strike="noStrike">
                 <a:solidFill>
                   <a:srgbClr val="000000"/>
@@ -1113,7 +1113,7 @@
               </a:lnSpc>
               <a:buNone/>
             </a:pPr>
-            <a:fld id="{606EB97F-90D3-429F-A52F-1E6F5B72B363}" type="slidenum">
+            <a:fld id="{35858F27-0067-45BC-A80C-122D9DFA09EA}" type="slidenum">
               <a:rPr lang="en-US" sz="1200" b="0" u="none" strike="noStrike">
                 <a:solidFill>
                   <a:srgbClr val="000000"/>
@@ -1330,7 +1330,7 @@
               </a:lnSpc>
               <a:buNone/>
             </a:pPr>
-            <a:fld id="{881970E7-9FEA-4A04-9358-FEEC3F0BA078}" type="slidenum">
+            <a:fld id="{6B9CFD1A-1C58-4E88-B271-26B4536CD48B}" type="slidenum">
               <a:rPr lang="en-US" sz="1200" b="0" u="none" strike="noStrike">
                 <a:solidFill>
                   <a:srgbClr val="000000"/>
@@ -1525,7 +1525,7 @@
               </a:lnSpc>
               <a:buNone/>
             </a:pPr>
-            <a:fld id="{E0576888-66C5-4246-8EEA-7F8C7081F42C}" type="slidenum">
+            <a:fld id="{C2F54AB5-2841-4C33-80D5-B64D84EA167B}" type="slidenum">
               <a:rPr lang="en-US" sz="1200" b="0" u="none" strike="noStrike">
                 <a:solidFill>
                   <a:srgbClr val="000000"/>
@@ -1720,7 +1720,7 @@
               </a:lnSpc>
               <a:buNone/>
             </a:pPr>
-            <a:fld id="{28C849E1-0DD5-4285-A227-152E6A028016}" type="slidenum">
+            <a:fld id="{258BFB28-B271-4EFC-A628-C90E0EDB82EC}" type="slidenum">
               <a:rPr lang="en-US" sz="1200" b="0" u="none" strike="noStrike">
                 <a:solidFill>
                   <a:srgbClr val="000000"/>
@@ -1915,7 +1915,7 @@
               </a:lnSpc>
               <a:buNone/>
             </a:pPr>
-            <a:fld id="{F3B1C07B-8851-45A8-890B-9AC841109CD2}" type="slidenum">
+            <a:fld id="{814FAA79-4899-4852-ADD9-C3A30213892B}" type="slidenum">
               <a:rPr lang="en-US" sz="1200" b="0" u="none" strike="noStrike">
                 <a:solidFill>
                   <a:srgbClr val="000000"/>
@@ -2110,7 +2110,7 @@
               </a:lnSpc>
               <a:buNone/>
             </a:pPr>
-            <a:fld id="{75C50E35-6443-4CCC-A7F9-E046764ECCF9}" type="slidenum">
+            <a:fld id="{80DC3CFF-9A3C-43D6-A79F-B91FBE7EF508}" type="slidenum">
               <a:rPr lang="en-US" sz="1200" b="0" u="none" strike="noStrike">
                 <a:solidFill>
                   <a:srgbClr val="000000"/>
@@ -2294,7 +2294,7 @@
               </a:lnSpc>
               <a:buNone/>
             </a:pPr>
-            <a:fld id="{6A044F22-97A0-4C62-A876-80C632643909}" type="slidenum">
+            <a:fld id="{471EEDAB-8DF3-4826-B7C1-9AB13CC4F33C}" type="slidenum">
               <a:rPr lang="en-US" sz="1200" b="0" u="none" strike="noStrike">
                 <a:solidFill>
                   <a:srgbClr val="000000"/>
@@ -2467,7 +2467,7 @@
               </a:lnSpc>
               <a:buNone/>
             </a:pPr>
-            <a:fld id="{BBADAD21-269C-4EDE-AE6D-2B7E283BF49C}" type="slidenum">
+            <a:fld id="{5EEEB1E1-60C8-4B96-A30F-DA97EE4DC8E4}" type="slidenum">
               <a:rPr lang="en-US" sz="1200" b="0" u="none" strike="noStrike">
                 <a:solidFill>
                   <a:srgbClr val="000000"/>
@@ -2640,7 +2640,7 @@
               </a:lnSpc>
               <a:buNone/>
             </a:pPr>
-            <a:fld id="{A92A55D3-F453-4B06-80DE-24985AB4FBDF}" type="slidenum">
+            <a:fld id="{126AC536-EA6E-404E-AB4C-7C24AB7E0618}" type="slidenum">
               <a:rPr lang="en-US" sz="1200" b="0" u="none" strike="noStrike">
                 <a:solidFill>
                   <a:srgbClr val="000000"/>
@@ -2957,7 +2957,7 @@
               </a:lnSpc>
               <a:buNone/>
             </a:pPr>
-            <a:fld id="{8B880186-95B6-4904-9C23-FA202EC901CA}" type="slidenum">
+            <a:fld id="{82194203-F044-49C4-A2B9-C015BB0C50A1}" type="slidenum">
               <a:rPr lang="en-US" sz="1200" b="0" u="none" strike="noStrike">
                 <a:solidFill>
                   <a:schemeClr val="dk1">
@@ -3666,7 +3666,7 @@
               </a:lnSpc>
               <a:buNone/>
             </a:pPr>
-            <a:fld id="{6FB673FA-C8D5-4AA0-BF43-FBD4210F4F04}" type="slidenum">
+            <a:fld id="{DE44C3BF-57D8-49CF-95B9-D182BD2B554D}" type="slidenum">
               <a:rPr lang="en-US" sz="1200" b="0" u="none" strike="noStrike">
                 <a:solidFill>
                   <a:schemeClr val="dk1">
@@ -4461,7 +4461,7 @@
               </a:lnSpc>
               <a:buNone/>
             </a:pPr>
-            <a:fld id="{D81C5786-E305-48E8-B43D-1C3FF1BB6EE6}" type="slidenum">
+            <a:fld id="{B0DB1A25-D1CA-4712-A3F6-E5E58AC25908}" type="slidenum">
               <a:rPr lang="en-US" sz="1200" b="0" u="none" strike="noStrike">
                 <a:solidFill>
                   <a:schemeClr val="dk1">
@@ -5086,7 +5086,7 @@
               </a:lnSpc>
               <a:buNone/>
             </a:pPr>
-            <a:fld id="{75D05435-06E4-44C1-BBE8-9ECAB8F5BD2A}" type="slidenum">
+            <a:fld id="{551BB3FF-83DB-494C-A8B1-6405F0D30018}" type="slidenum">
               <a:rPr lang="en-US" sz="1200" b="0" u="none" strike="noStrike">
                 <a:solidFill>
                   <a:schemeClr val="dk1">
@@ -5711,7 +5711,7 @@
               </a:lnSpc>
               <a:buNone/>
             </a:pPr>
-            <a:fld id="{3C2A3EFB-A64D-4B1D-AD7A-F43BF14C229C}" type="slidenum">
+            <a:fld id="{B643B7F4-382E-4D40-AFCD-2666BB8C0DF8}" type="slidenum">
               <a:rPr lang="en-US" sz="1200" b="0" u="none" strike="noStrike">
                 <a:solidFill>
                   <a:schemeClr val="dk1">
@@ -6336,7 +6336,7 @@
               </a:lnSpc>
               <a:buNone/>
             </a:pPr>
-            <a:fld id="{7A11F0E0-96D2-4EBB-9383-42E127D328B2}" type="slidenum">
+            <a:fld id="{F55F2B33-863F-4B59-9A3B-8F20EC74020B}" type="slidenum">
               <a:rPr lang="en-US" sz="1200" b="0" u="none" strike="noStrike">
                 <a:solidFill>
                   <a:schemeClr val="dk1">
@@ -6745,7 +6745,7 @@
               </a:lnSpc>
               <a:buNone/>
             </a:pPr>
-            <a:fld id="{C7E054F7-014C-438B-A55E-72A0B1A5CD50}" type="slidenum">
+            <a:fld id="{4DAEF883-A459-49BB-9B11-D7689EB76171}" type="slidenum">
               <a:rPr lang="en-US" sz="1200" b="0" u="none" strike="noStrike">
                 <a:solidFill>
                   <a:schemeClr val="dk1">
@@ -7676,7 +7676,7 @@
               </a:lnSpc>
               <a:buNone/>
             </a:pPr>
-            <a:fld id="{E8FB9034-E520-494B-8278-50CFB0CB66E7}" type="slidenum">
+            <a:fld id="{E54DC944-25B9-4C8B-BAA3-AAD5FDAAFAEE}" type="slidenum">
               <a:rPr lang="en-US" sz="1200" b="0" u="none" strike="noStrike">
                 <a:solidFill>
                   <a:schemeClr val="dk1">
@@ -8835,7 +8835,7 @@
               </a:lnSpc>
               <a:buNone/>
             </a:pPr>
-            <a:fld id="{CB381A56-F6EC-48D4-BBFE-E2F635EEAF5C}" type="slidenum">
+            <a:fld id="{8F1B7ACF-A21E-4597-A1CE-DC3255E16592}" type="slidenum">
               <a:rPr lang="en-US" sz="1200" b="0" u="none" strike="noStrike">
                 <a:solidFill>
                   <a:schemeClr val="dk1">
@@ -9154,7 +9154,7 @@
               </a:lnSpc>
               <a:buNone/>
             </a:pPr>
-            <a:fld id="{704F78F9-E291-4324-A282-D0ED5FF06064}" type="slidenum">
+            <a:fld id="{EB4707DC-C18D-4D33-8403-D0A2D81EFA4A}" type="slidenum">
               <a:rPr lang="en-US" sz="1200" b="0" u="none" strike="noStrike">
                 <a:solidFill>
                   <a:schemeClr val="dk1">
@@ -9401,7 +9401,7 @@
               </a:lnSpc>
               <a:buNone/>
             </a:pPr>
-            <a:fld id="{C7BE9744-646F-4DBC-91BE-258A8C167BF6}" type="slidenum">
+            <a:fld id="{10CF669F-C8A7-4858-86FA-275A08D89067}" type="slidenum">
               <a:rPr lang="en-US" sz="1200" b="0" u="none" strike="noStrike">
                 <a:solidFill>
                   <a:schemeClr val="dk1">
@@ -31870,7 +31870,7 @@
         <p:spPr>
           <a:xfrm>
             <a:off x="567000" y="457200"/>
-            <a:ext cx="1682280" cy="365400"/>
+            <a:ext cx="1389600" cy="365400"/>
           </a:xfrm>
           <a:prstGeom prst="roundRect">
             <a:avLst>
@@ -31984,7 +31984,7 @@
         <p:spPr>
           <a:xfrm>
             <a:off x="1005840" y="457200"/>
-            <a:ext cx="1682280" cy="365400"/>
+            <a:ext cx="1389600" cy="365400"/>
           </a:xfrm>
           <a:prstGeom prst="rect">
             <a:avLst/>
@@ -32011,7 +32011,7 @@
               </a:lnSpc>
             </a:pPr>
             <a:r>
-              <a:rPr lang="en-US" sz="1250" b="1" u="none" strike="noStrike">
+              <a:rPr lang="zh-CN" sz="1250" b="1" u="none" strike="noStrike">
                 <a:solidFill>
                   <a:srgbClr val="FFC93C"/>
                 </a:solidFill>
@@ -32020,7 +32020,7 @@
                 <a:latin typeface="Arial Rounded MT Bold"/>
                 <a:ea typeface="Hiragino Sans GB"/>
               </a:rPr>
-              <a:t>② 再多说一点</a:t>
+              <a:t>再多说一点</a:t>
             </a:r>
             <a:endParaRPr lang="en-US" sz="1250" b="0" u="none" strike="noStrike">
               <a:solidFill>
@@ -37273,7 +37273,7 @@
         <p:spPr>
           <a:xfrm>
             <a:off x="567000" y="457200"/>
-            <a:ext cx="1828440" cy="365400"/>
+            <a:ext cx="1535760" cy="365400"/>
           </a:xfrm>
           <a:prstGeom prst="roundRect">
             <a:avLst>
@@ -37387,7 +37387,7 @@
         <p:spPr>
           <a:xfrm>
             <a:off x="1005840" y="457200"/>
-            <a:ext cx="1828440" cy="365400"/>
+            <a:ext cx="1535760" cy="365400"/>
           </a:xfrm>
           <a:prstGeom prst="rect">
             <a:avLst/>
@@ -37414,7 +37414,7 @@
               </a:lnSpc>
             </a:pPr>
             <a:r>
-              <a:rPr lang="en-US" sz="1250" b="1" u="none" strike="noStrike">
+              <a:rPr lang="zh-CN" sz="1250" b="1" u="none" strike="noStrike">
                 <a:solidFill>
                   <a:srgbClr val="FF6B6B"/>
                 </a:solidFill>
@@ -37423,7 +37423,7 @@
                 <a:latin typeface="Arial Rounded MT Bold"/>
                 <a:ea typeface="Hiragino Sans GB"/>
               </a:rPr>
-              <a:t>③ 它不太会的事</a:t>
+              <a:t>它不太会的事</a:t>
             </a:r>
             <a:endParaRPr lang="en-US" sz="1250" b="0" u="none" strike="noStrike">
               <a:solidFill>
